--- a/presentation_citalid.pptx
+++ b/presentation_citalid.pptx
@@ -955,37 +955,37 @@
           </a:p>
           <a:p>
             <a:r>
-              <a:t>La plus gênante est la première : p_materialize fait correspondre cette entreprise à ses pairs</a:t>
-            </a:r>
-          </a:p>
-          <a:p>
-            <a:r>
-              <a:t>mais ne sait pas dire pourquoi, si bien qu'améliorer la maturité de 55 à 75 ne bougerait pas la</a:t>
-            </a:r>
-          </a:p>
-          <a:p>
-            <a:r>
-              <a:t>perte modélisée — le mauvais signal pour un outil censé justifier un budget sécurité.</a:t>
-            </a:r>
-          </a:p>
-          <a:p>
-            <a:r>
-              <a:t>Ce que je n'ai pas fait faute de données : la régression maturité vers vulnérabilité demande un</a:t>
-            </a:r>
-          </a:p>
-          <a:p>
-            <a:r>
-              <a:t>dénominateur d'exposition que la base ne contient pas, puisqu'elle recense des incidents et non</a:t>
-            </a:r>
-          </a:p>
-          <a:p>
-            <a:r>
-              <a:t>des années-organisation à risque, et fabriquer cette courbe aurait donné un coefficient</a:t>
-            </a:r>
-          </a:p>
-          <a:p>
-            <a:r>
-              <a:t>d'allure confiante sans rien derrière.</a:t>
+              <a:t>La plus gênante est la première : en ancrant le taux d'incidents entièrement sur les pairs, j'ai</a:t>
+            </a:r>
+          </a:p>
+          <a:p>
+            <a:r>
+              <a:t>retiré tout poids à l'observation propre de l'entreprise — un parc réellement attaqué deux fois</a:t>
+            </a:r>
+          </a:p>
+          <a:p>
+            <a:r>
+              <a:t>plus que ses pairs serait aujourd'hui tarifé à l'identique.</a:t>
+            </a:r>
+          </a:p>
+          <a:p>
+            <a:r>
+              <a:t>Le correctif est un mélange de crédibilité Gamma-Poisson, où le poids accordé à la télémétrie</a:t>
+            </a:r>
+          </a:p>
+          <a:p>
+            <a:r>
+              <a:t>croît avec la fenêtre d'observation. Ce que je n'ai pas fait faute de données : ce mélange</a:t>
+            </a:r>
+          </a:p>
+          <a:p>
+            <a:r>
+              <a:t>demande de savoir combien d'années-organisation de télémétrie valent une année de taux de base,</a:t>
+            </a:r>
+          </a:p>
+          <a:p>
+            <a:r>
+              <a:t>et une seule entreprise observée ne permet pas de l'estimer.</a:t>
             </a:r>
           </a:p>
         </p:txBody>
@@ -7565,7 +7565,7 @@
                 </a:solidFill>
                 <a:latin typeface="Segoe UI"/>
               </a:rPr>
-              <a:t>p_materialize est un scalaire</a:t>
+              <a:t>La télémétrie ne pilote plus le niveau</a:t>
             </a:r>
           </a:p>
         </p:txBody>
@@ -7604,7 +7604,7 @@
                 </a:solidFill>
                 <a:latin typeface="Segoe UI"/>
               </a:rPr>
-              <a:t>un seul nombre absorbe le bruit des sondes, la qualité des contrôles et la vitesse de réaction</a:t>
+              <a:t>le taux d'incidents est entièrement ancré sur les pairs ; sept mois d'observation propre pèsent zéro</a:t>
             </a:r>
           </a:p>
         </p:txBody>
@@ -7643,7 +7643,7 @@
                 </a:solidFill>
                 <a:latin typeface="Segoe UI"/>
               </a:rPr>
-              <a:t>→ vulnérabilité FAIR pilotée par la maturité</a:t>
+              <a:t>→ mélange de crédibilité Gamma-Poisson</a:t>
             </a:r>
           </a:p>
         </p:txBody>
